--- a/Schools_ML_Track/camp_2026/slides/ML/ML25.pptx
+++ b/Schools_ML_Track/camp_2026/slides/ML/ML25.pptx
@@ -117,7 +117,7 @@
   <p:extLst>
     <p:ext uri="{521415D9-36F7-43E2-AB2F-B90AF26B5E84}">
       <p14:sectionLst xmlns:p14="http://schemas.microsoft.com/office/powerpoint/2010/main">
-        <p14:section name="Opening" id="{2c4b987a-98cd-b20d-6530-8fcc3511daf7}">
+        <p14:section name="Opening" id="{1c532efb-b812-9dda-0380-a2031201177d}">
           <p14:sldIdLst>
             <p14:sldId id="256"/>
             <p14:sldId id="257"/>
@@ -125,7 +125,7 @@
             <p14:sldId id="259"/>
           </p14:sldIdLst>
         </p14:section>
-        <p14:section name="Block A" id="{5cea135a-fea6-3d2a-33ab-c245213a8e4d}">
+        <p14:section name="Block A" id="{f9aa412e-7c41-e71f-23fb-4d45beaab02c}">
           <p14:sldIdLst>
             <p14:sldId id="260"/>
             <p14:sldId id="261"/>
@@ -133,7 +133,7 @@
             <p14:sldId id="263"/>
           </p14:sldIdLst>
         </p14:section>
-        <p14:section name="Make and close" id="{4a528331-a384-dfde-34ea-17563f2ece69}">
+        <p14:section name="Make and close" id="{e95b6e8b-37d1-648d-82f2-4f87feee4d76}">
           <p14:sldIdLst>
             <p14:sldId id="264"/>
             <p14:sldId id="265"/>

--- a/Schools_ML_Track/camp_2026/slides/ML/ML25.pptx
+++ b/Schools_ML_Track/camp_2026/slides/ML/ML25.pptx
@@ -117,7 +117,7 @@
   <p:extLst>
     <p:ext uri="{521415D9-36F7-43E2-AB2F-B90AF26B5E84}">
       <p14:sectionLst xmlns:p14="http://schemas.microsoft.com/office/powerpoint/2010/main">
-        <p14:section name="Opening" id="{1c532efb-b812-9dda-0380-a2031201177d}">
+        <p14:section name="Opening" id="{8a4b6bd6-a4ff-da34-c227-40a240c22f75}">
           <p14:sldIdLst>
             <p14:sldId id="256"/>
             <p14:sldId id="257"/>
@@ -125,7 +125,7 @@
             <p14:sldId id="259"/>
           </p14:sldIdLst>
         </p14:section>
-        <p14:section name="Block A" id="{f9aa412e-7c41-e71f-23fb-4d45beaab02c}">
+        <p14:section name="Block A" id="{5cb7199a-d16a-a0b2-3007-9be29f5724f7}">
           <p14:sldIdLst>
             <p14:sldId id="260"/>
             <p14:sldId id="261"/>
@@ -133,7 +133,7 @@
             <p14:sldId id="263"/>
           </p14:sldIdLst>
         </p14:section>
-        <p14:section name="Make and close" id="{e95b6e8b-37d1-648d-82f2-4f87feee4d76}">
+        <p14:section name="Make and close" id="{f0462853-7d2d-22f5-d694-2ff85c5dea32}">
           <p14:sldIdLst>
             <p14:sldId id="264"/>
             <p14:sldId id="265"/>
@@ -2176,7 +2176,24 @@
                 <a:ea typeface="Lato" pitchFamily="34" charset="-122"/>
                 <a:cs typeface="Lato" pitchFamily="34" charset="-120"/>
               </a:rPr>
-              <a:t>A first neural network, and why bigger is not automatically better</a:t>
+              <a:t>A first neural network, and why</a:t>
+            </a:r>
+            <a:endParaRPr lang="en-US" sz="5300" dirty="0"/>
+          </a:p>
+          <a:p>
+            <a:pPr algn="l" indent="0" marL="0">
+              <a:buNone/>
+            </a:pPr>
+            <a:r>
+              <a:rPr lang="en-US" sz="5300" b="1" dirty="0">
+                <a:solidFill>
+                  <a:srgbClr val="FFFFFF"/>
+                </a:solidFill>
+                <a:latin typeface="Lato" pitchFamily="34" charset="0"/>
+                <a:ea typeface="Lato" pitchFamily="34" charset="-122"/>
+                <a:cs typeface="Lato" pitchFamily="34" charset="-120"/>
+              </a:rPr>
+              <a:t>bigger is not automatically better</a:t>
             </a:r>
             <a:endParaRPr lang="en-US" sz="5300" dirty="0"/>
           </a:p>
@@ -4464,15 +4481,15 @@
           <a:p>
             <a:pPr algn="l" indent="0" marL="0">
               <a:lnSpc>
-                <a:spcPts val="3600"/>
+                <a:spcPts val="3360"/>
               </a:lnSpc>
               <a:spcAft>
-                <a:spcPts val="2520"/>
+                <a:spcPts val="2020"/>
               </a:spcAft>
               <a:buNone/>
             </a:pPr>
             <a:r>
-              <a:rPr lang="en-US" sz="3000" dirty="0">
+              <a:rPr lang="en-US" sz="2800" dirty="0">
                 <a:solidFill>
                   <a:srgbClr val="111111"/>
                 </a:solidFill>
@@ -4482,20 +4499,20 @@
               </a:rPr>
               <a:t>Write two sentences: which model scored best and whether the difference is big enough to matter.</a:t>
             </a:r>
-            <a:endParaRPr lang="en-US" sz="3000" dirty="0"/>
+            <a:endParaRPr lang="en-US" sz="2800" dirty="0"/>
           </a:p>
           <a:p>
             <a:pPr algn="l" indent="0" marL="0">
               <a:lnSpc>
-                <a:spcPts val="3600"/>
+                <a:spcPts val="3360"/>
               </a:lnSpc>
               <a:spcAft>
-                <a:spcPts val="2520"/>
+                <a:spcPts val="2020"/>
               </a:spcAft>
               <a:buNone/>
             </a:pPr>
             <a:r>
-              <a:rPr lang="en-US" sz="3000" dirty="0">
+              <a:rPr lang="en-US" sz="2800" dirty="0">
                 <a:solidFill>
                   <a:srgbClr val="111111"/>
                 </a:solidFill>
@@ -4505,7 +4522,7 @@
               </a:rPr>
               <a:t>Save it as ML25. Write two sentences: what you changed and how you checked it.</a:t>
             </a:r>
-            <a:endParaRPr lang="en-US" sz="3000" dirty="0"/>
+            <a:endParaRPr lang="en-US" sz="2800" dirty="0"/>
           </a:p>
         </p:txBody>
       </p:sp>
